--- a/docs/Ngspice-OpenVAF-Features.pptx
+++ b/docs/Ngspice-OpenVAF-Features.pptx
@@ -145,7 +145,7 @@
   <p:extLst>
     <p:ext uri="{521415D9-36F7-43E2-AB2F-B90AF26B5E84}">
       <p14:sectionLst xmlns:p14="http://schemas.microsoft.com/office/powerpoint/2010/main">
-        <p14:section name="Introduction" id="{463092AF-1253-46D7-AA3E-7CC04111BEC1}">
+        <p14:section name="Introduction" id="{AD82F49D-8935-5C7F-B68D-44FCD688D914}">
           <p14:sldIdLst>
             <p14:sldId id="256"/>
             <p14:sldId id="257"/>
@@ -154,7 +154,7 @@
             <p14:sldId id="260"/>
           </p14:sldIdLst>
         </p14:section>
-        <p14:section name="Part 1 · openvaf-r" id="{46B70520-DCFE-4F2D-9EE1-E91BCEB13D40}">
+        <p14:section name="Part 1 · openvaf-r" id="{D16D05A0-F8FA-588D-BB48-FC5C2236B6E2}">
           <p14:sldIdLst>
             <p14:sldId id="261"/>
             <p14:sldId id="262"/>
@@ -167,7 +167,7 @@
             <p14:sldId id="269"/>
           </p14:sldIdLst>
         </p14:section>
-        <p14:section name="Part 2 · ngspice-46" id="{D5EF0960-DC5E-4E1D-A731-40740D0682B5}">
+        <p14:section name="Part 2 · ngspice-46" id="{ED007827-684C-5494-A0CD-B6D43E6BBB06}">
           <p14:sldIdLst>
             <p14:sldId id="270"/>
             <p14:sldId id="271"/>
@@ -185,7 +185,7 @@
             <p14:sldId id="283"/>
           </p14:sldIdLst>
         </p14:section>
-        <p14:section name="Part 3 · Verification" id="{55AEBE3B-A7E3-477F-80CF-FC263FF0B104}">
+        <p14:section name="Part 3 · Verification" id="{35B1FD2D-A584-5175-B0FA-5A1D00750D0D}">
           <p14:sldIdLst>
             <p14:sldId id="284"/>
             <p14:sldId id="285"/>
@@ -195,7 +195,7 @@
             <p14:sldId id="289"/>
           </p14:sldIdLst>
         </p14:section>
-        <p14:section name="Part 4 · Using it" id="{390B179D-A11D-419D-A275-A93C58D2177E}">
+        <p14:section name="Part 4 · Using it" id="{FDB62740-E468-5ABB-B6BF-4B1D218E1543}">
           <p14:sldIdLst>
             <p14:sldId id="290"/>
             <p14:sldId id="291"/>
@@ -326,7 +326,7 @@
             <c:idx val="11"/>
             <c:spPr>
               <a:solidFill>
-                <a:schemeClr val="accent2"/>
+                <a:schemeClr val="accent1"/>
               </a:solidFill>
             </c:spPr>
           </c:dPt>
@@ -334,7 +334,7 @@
             <c:idx val="12"/>
             <c:spPr>
               <a:solidFill>
-                <a:schemeClr val="accent1"/>
+                <a:schemeClr val="accent2"/>
               </a:solidFill>
             </c:spPr>
           </c:dPt>
@@ -425,10 +425,10 @@
                   <c:v>Branches, nets &amp; ports</c:v>
                 </c:pt>
                 <c:pt idx="11">
-                  <c:v>KLU solver parity &amp; tuning</c:v>
+                  <c:v>Operators, control flow &amp; preprocessor</c:v>
                 </c:pt>
                 <c:pt idx="12">
-                  <c:v>Operators, control flow &amp; preprocessor</c:v>
+                  <c:v>KLU solver parity &amp; tuning</c:v>
                 </c:pt>
                 <c:pt idx="13">
                   <c:v>Arrays</c:v>
@@ -581,7 +581,7 @@
       <c:valAx>
         <c:axId val="-2113994440"/>
         <c:scaling>
-          <c:max val="350.0"/>
+          <c:max val="360.0"/>
         </c:scaling>
         <c:delete/>
         <c:axPos val="b"/>
@@ -4053,7 +4053,7 @@
           <a:lstStyle/>
           <a:p>
             <a:pPr algn="r"/>
-            <a:fld id="{2C3FDFB8-FC10-4720-9890-0464EC5C70AD}" type="slidenum">
+            <a:fld id="{EF5D7B1E-205C-569F-AB7E-863B17A04093}" type="slidenum">
               <a:rPr lang="en-US" sz="1000">
                 <a:solidFill>
                   <a:schemeClr val="accent3"/>
